--- a/workshops/workshop-historias-usuario-documentacao.pptx
+++ b/workshops/workshop-historias-usuario-documentacao.pptx
@@ -25969,7 +25969,7 @@
         <p:spPr>
           <a:xfrm>
             <a:off x="4956048" y="3849624"/>
-            <a:ext cx="-1188720" cy="-1188720"/>
+            <a:ext cx="-1207008" cy="-1252728"/>
           </a:xfrm>
           <a:prstGeom prst="line">
             <a:avLst/>
@@ -25992,24 +25992,24 @@
         </p:nvSpPr>
         <p:spPr>
           <a:xfrm>
-            <a:off x="685800" y="3977640"/>
-            <a:ext cx="4206240" cy="594360"/>
-          </a:xfrm>
-          <a:prstGeom prst="rect">
-            <a:avLst/>
-          </a:prstGeom>
-          <a:noFill/>
-          <a:ln/>
-        </p:spPr>
-        <p:txBody>
-          <a:bodyPr wrap="square" lIns="0" tIns="0" rIns="0" bIns="0" rtlCol="0" anchor="ctr"/>
-          <a:lstStyle/>
-          <a:p>
-            <a:pPr indent="0" marL="0">
-              <a:buNone/>
-            </a:pPr>
-            <a:r>
-              <a:rPr lang="en-US" sz="1050" i="1" dirty="0">
+            <a:off x="2651760" y="3017520"/>
+            <a:ext cx="1600200" cy="256032"/>
+          </a:xfrm>
+          <a:prstGeom prst="rect">
+            <a:avLst/>
+          </a:prstGeom>
+          <a:noFill/>
+          <a:ln/>
+        </p:spPr>
+        <p:txBody>
+          <a:bodyPr wrap="square" lIns="0" tIns="0" rIns="0" bIns="0" rtlCol="0" anchor="ctr"/>
+          <a:lstStyle/>
+          <a:p>
+            <a:pPr algn="r" indent="0" marL="0">
+              <a:buNone/>
+            </a:pPr>
+            <a:r>
+              <a:rPr lang="en-US" sz="1000" b="1" i="1" dirty="0">
                 <a:solidFill>
                   <a:srgbClr val="B2492F"/>
                 </a:solidFill>
@@ -26017,15 +26017,57 @@
                 <a:ea typeface="Calibri" pitchFamily="34" charset="-122"/>
                 <a:cs typeface="Calibri" pitchFamily="34" charset="-120"/>
               </a:rPr>
-              <a:t>⚠ reencaminhamento: permitido? com limite? — não especificado no caso real</a:t>
-            </a:r>
-            <a:endParaRPr lang="en-US" sz="1050" dirty="0"/>
+              <a:t>reencaminhar?</a:t>
+            </a:r>
+            <a:endParaRPr lang="en-US" sz="1000" dirty="0"/>
           </a:p>
         </p:txBody>
       </p:sp>
       <p:sp>
         <p:nvSpPr>
           <p:cNvPr id="25" name="Text 23"/>
+          <p:cNvSpPr/>
+          <p:nvPr/>
+        </p:nvSpPr>
+        <p:spPr>
+          <a:xfrm>
+            <a:off x="7086600" y="3566160"/>
+            <a:ext cx="4434840" cy="868680"/>
+          </a:xfrm>
+          <a:prstGeom prst="rect">
+            <a:avLst/>
+          </a:prstGeom>
+          <a:noFill/>
+          <a:ln/>
+        </p:spPr>
+        <p:txBody>
+          <a:bodyPr wrap="square" lIns="0" tIns="0" rIns="0" bIns="0" rtlCol="0" anchor="ctr"/>
+          <a:lstStyle/>
+          <a:p>
+            <a:pPr indent="0" marL="0">
+              <a:lnSpc>
+                <a:spcPct val="104000"/>
+              </a:lnSpc>
+              <a:buNone/>
+            </a:pPr>
+            <a:r>
+              <a:rPr lang="en-US" sz="1000" i="1" dirty="0">
+                <a:solidFill>
+                  <a:srgbClr val="B2492F"/>
+                </a:solidFill>
+                <a:latin typeface="Calibri" pitchFamily="34" charset="0"/>
+                <a:ea typeface="Calibri" pitchFamily="34" charset="-122"/>
+                <a:cs typeface="Calibri" pitchFamily="34" charset="-120"/>
+              </a:rPr>
+              <a:t>⚠ E a volta? A seta tracejada (devolvida → encaminhada) existe no processo, mas o caso real não diz se o reencaminhamento é permitido, nem com que limite.</a:t>
+            </a:r>
+            <a:endParaRPr lang="en-US" sz="1000" dirty="0"/>
+          </a:p>
+        </p:txBody>
+      </p:sp>
+      <p:sp>
+        <p:nvSpPr>
+          <p:cNvPr id="26" name="Text 24"/>
           <p:cNvSpPr/>
           <p:nvPr/>
         </p:nvSpPr>
@@ -26064,7 +26106,7 @@
       </p:sp>
       <p:sp>
         <p:nvSpPr>
-          <p:cNvPr id="26" name="Shape 24"/>
+          <p:cNvPr id="27" name="Shape 25"/>
           <p:cNvSpPr/>
           <p:nvPr/>
         </p:nvSpPr>
@@ -26086,7 +26128,7 @@
       </p:sp>
       <p:sp>
         <p:nvSpPr>
-          <p:cNvPr id="27" name="Text 25"/>
+          <p:cNvPr id="28" name="Text 26"/>
           <p:cNvSpPr/>
           <p:nvPr/>
         </p:nvSpPr>

--- a/workshops/workshop-historias-usuario-documentacao.pptx
+++ b/workshops/workshop-historias-usuario-documentacao.pptx
@@ -26510,7 +26510,7 @@
         </p:nvSpPr>
         <p:spPr>
           <a:xfrm>
-            <a:off x="3136392" y="2331720"/>
+            <a:off x="3136392" y="2404872"/>
             <a:ext cx="365760" cy="0"/>
           </a:xfrm>
           <a:prstGeom prst="line">
@@ -26522,6 +26522,7 @@
               <a:srgbClr val="C77F1A"/>
             </a:solidFill>
             <a:prstDash val="solid"/>
+            <a:headEnd type="triangle"/>
             <a:tailEnd type="triangle"/>
           </a:ln>
         </p:spPr>
@@ -26529,30 +26530,6 @@
       <p:sp>
         <p:nvSpPr>
           <p:cNvPr id="12" name="Shape 9"/>
-          <p:cNvSpPr/>
-          <p:nvPr/>
-        </p:nvSpPr>
-        <p:spPr>
-          <a:xfrm>
-            <a:off x="3502152" y="2487168"/>
-            <a:ext cx="-365760" cy="0"/>
-          </a:xfrm>
-          <a:prstGeom prst="line">
-            <a:avLst/>
-          </a:prstGeom>
-          <a:noFill/>
-          <a:ln w="27940">
-            <a:solidFill>
-              <a:srgbClr val="C77F1A"/>
-            </a:solidFill>
-            <a:prstDash val="solid"/>
-            <a:tailEnd type="triangle"/>
-          </a:ln>
-        </p:spPr>
-      </p:sp>
-      <p:sp>
-        <p:nvSpPr>
-          <p:cNvPr id="13" name="Shape 10"/>
           <p:cNvSpPr/>
           <p:nvPr/>
         </p:nvSpPr>
@@ -26579,7 +26556,7 @@
       </p:sp>
       <p:sp>
         <p:nvSpPr>
-          <p:cNvPr id="14" name="Shape 11"/>
+          <p:cNvPr id="13" name="Shape 10"/>
           <p:cNvSpPr/>
           <p:nvPr/>
         </p:nvSpPr>
@@ -26599,7 +26576,7 @@
       </p:sp>
       <p:pic>
         <p:nvPicPr>
-          <p:cNvPr id="15" name="Image 1" descr="/tmp/claude-0/-home-user-doc-template-engine/198c21fb-8b4a-5b3c-a787-7fafcb963965/scratchpad/workshop/icons/file-white.png">    </p:cNvPr>
+          <p:cNvPr id="14" name="Image 1" descr="/tmp/claude-0/-home-user-doc-template-engine/198c21fb-8b4a-5b3c-a787-7fafcb963965/scratchpad/workshop/icons/file-white.png">    </p:cNvPr>
           <p:cNvPicPr>
             <a:picLocks noChangeAspect="1"/>
           </p:cNvPicPr>
@@ -26623,7 +26600,7 @@
       </p:pic>
       <p:sp>
         <p:nvSpPr>
-          <p:cNvPr id="16" name="Text 12"/>
+          <p:cNvPr id="15" name="Text 11"/>
           <p:cNvSpPr/>
           <p:nvPr/>
         </p:nvSpPr>
@@ -26662,7 +26639,7 @@
       </p:sp>
       <p:sp>
         <p:nvSpPr>
-          <p:cNvPr id="17" name="Text 13"/>
+          <p:cNvPr id="16" name="Text 12"/>
           <p:cNvSpPr/>
           <p:nvPr/>
         </p:nvSpPr>
@@ -26701,13 +26678,13 @@
       </p:sp>
       <p:sp>
         <p:nvSpPr>
-          <p:cNvPr id="18" name="Shape 14"/>
-          <p:cNvSpPr/>
-          <p:nvPr/>
-        </p:nvSpPr>
-        <p:spPr>
-          <a:xfrm>
-            <a:off x="6062472" y="2331720"/>
+          <p:cNvPr id="17" name="Shape 13"/>
+          <p:cNvSpPr/>
+          <p:nvPr/>
+        </p:nvSpPr>
+        <p:spPr>
+          <a:xfrm>
+            <a:off x="6062472" y="2404872"/>
             <a:ext cx="365760" cy="0"/>
           </a:xfrm>
           <a:prstGeom prst="line">
@@ -26719,37 +26696,14 @@
               <a:srgbClr val="C77F1A"/>
             </a:solidFill>
             <a:prstDash val="solid"/>
+            <a:headEnd type="triangle"/>
             <a:tailEnd type="triangle"/>
           </a:ln>
         </p:spPr>
       </p:sp>
       <p:sp>
         <p:nvSpPr>
-          <p:cNvPr id="19" name="Shape 15"/>
-          <p:cNvSpPr/>
-          <p:nvPr/>
-        </p:nvSpPr>
-        <p:spPr>
-          <a:xfrm>
-            <a:off x="6428232" y="2487168"/>
-            <a:ext cx="-365760" cy="0"/>
-          </a:xfrm>
-          <a:prstGeom prst="line">
-            <a:avLst/>
-          </a:prstGeom>
-          <a:noFill/>
-          <a:ln w="27940">
-            <a:solidFill>
-              <a:srgbClr val="C77F1A"/>
-            </a:solidFill>
-            <a:prstDash val="solid"/>
-            <a:tailEnd type="triangle"/>
-          </a:ln>
-        </p:spPr>
-      </p:sp>
-      <p:sp>
-        <p:nvSpPr>
-          <p:cNvPr id="20" name="Shape 16"/>
+          <p:cNvPr id="18" name="Shape 14"/>
           <p:cNvSpPr/>
           <p:nvPr/>
         </p:nvSpPr>
@@ -26776,7 +26730,7 @@
       </p:sp>
       <p:sp>
         <p:nvSpPr>
-          <p:cNvPr id="21" name="Shape 17"/>
+          <p:cNvPr id="19" name="Shape 15"/>
           <p:cNvSpPr/>
           <p:nvPr/>
         </p:nvSpPr>
@@ -26796,7 +26750,7 @@
       </p:sp>
       <p:pic>
         <p:nvPicPr>
-          <p:cNvPr id="22" name="Image 2" descr="/tmp/claude-0/-home-user-doc-template-engine/198c21fb-8b4a-5b3c-a787-7fafcb963965/scratchpad/workshop/icons/check-white.png">    </p:cNvPr>
+          <p:cNvPr id="20" name="Image 2" descr="/tmp/claude-0/-home-user-doc-template-engine/198c21fb-8b4a-5b3c-a787-7fafcb963965/scratchpad/workshop/icons/check-white.png">    </p:cNvPr>
           <p:cNvPicPr>
             <a:picLocks noChangeAspect="1"/>
           </p:cNvPicPr>
@@ -26820,7 +26774,7 @@
       </p:pic>
       <p:sp>
         <p:nvSpPr>
-          <p:cNvPr id="23" name="Text 18"/>
+          <p:cNvPr id="21" name="Text 16"/>
           <p:cNvSpPr/>
           <p:nvPr/>
         </p:nvSpPr>
@@ -26859,7 +26813,7 @@
       </p:sp>
       <p:sp>
         <p:nvSpPr>
-          <p:cNvPr id="24" name="Text 19"/>
+          <p:cNvPr id="22" name="Text 17"/>
           <p:cNvSpPr/>
           <p:nvPr/>
         </p:nvSpPr>
@@ -26898,13 +26852,13 @@
       </p:sp>
       <p:sp>
         <p:nvSpPr>
-          <p:cNvPr id="25" name="Shape 20"/>
-          <p:cNvSpPr/>
-          <p:nvPr/>
-        </p:nvSpPr>
-        <p:spPr>
-          <a:xfrm>
-            <a:off x="8988552" y="2331720"/>
+          <p:cNvPr id="23" name="Shape 18"/>
+          <p:cNvSpPr/>
+          <p:nvPr/>
+        </p:nvSpPr>
+        <p:spPr>
+          <a:xfrm>
+            <a:off x="8988552" y="2404872"/>
             <a:ext cx="365760" cy="0"/>
           </a:xfrm>
           <a:prstGeom prst="line">
@@ -26916,37 +26870,14 @@
               <a:srgbClr val="C77F1A"/>
             </a:solidFill>
             <a:prstDash val="solid"/>
+            <a:headEnd type="triangle"/>
             <a:tailEnd type="triangle"/>
           </a:ln>
         </p:spPr>
       </p:sp>
       <p:sp>
         <p:nvSpPr>
-          <p:cNvPr id="26" name="Shape 21"/>
-          <p:cNvSpPr/>
-          <p:nvPr/>
-        </p:nvSpPr>
-        <p:spPr>
-          <a:xfrm>
-            <a:off x="9354312" y="2487168"/>
-            <a:ext cx="-365760" cy="0"/>
-          </a:xfrm>
-          <a:prstGeom prst="line">
-            <a:avLst/>
-          </a:prstGeom>
-          <a:noFill/>
-          <a:ln w="27940">
-            <a:solidFill>
-              <a:srgbClr val="C77F1A"/>
-            </a:solidFill>
-            <a:prstDash val="solid"/>
-            <a:tailEnd type="triangle"/>
-          </a:ln>
-        </p:spPr>
-      </p:sp>
-      <p:sp>
-        <p:nvSpPr>
-          <p:cNvPr id="27" name="Shape 22"/>
+          <p:cNvPr id="24" name="Shape 19"/>
           <p:cNvSpPr/>
           <p:nvPr/>
         </p:nvSpPr>
@@ -26973,7 +26904,7 @@
       </p:sp>
       <p:sp>
         <p:nvSpPr>
-          <p:cNvPr id="28" name="Shape 23"/>
+          <p:cNvPr id="25" name="Shape 20"/>
           <p:cNvSpPr/>
           <p:nvPr/>
         </p:nvSpPr>
@@ -26993,7 +26924,7 @@
       </p:sp>
       <p:pic>
         <p:nvPicPr>
-          <p:cNvPr id="29" name="Image 3" descr="/tmp/claude-0/-home-user-doc-template-engine/198c21fb-8b4a-5b3c-a787-7fafcb963965/scratchpad/workshop/icons/gitbranch-white.png">    </p:cNvPr>
+          <p:cNvPr id="26" name="Image 3" descr="/tmp/claude-0/-home-user-doc-template-engine/198c21fb-8b4a-5b3c-a787-7fafcb963965/scratchpad/workshop/icons/gitbranch-white.png">    </p:cNvPr>
           <p:cNvPicPr>
             <a:picLocks noChangeAspect="1"/>
           </p:cNvPicPr>
@@ -27017,7 +26948,7 @@
       </p:pic>
       <p:sp>
         <p:nvSpPr>
-          <p:cNvPr id="30" name="Text 24"/>
+          <p:cNvPr id="27" name="Text 21"/>
           <p:cNvSpPr/>
           <p:nvPr/>
         </p:nvSpPr>
@@ -27056,7 +26987,7 @@
       </p:sp>
       <p:sp>
         <p:nvSpPr>
-          <p:cNvPr id="31" name="Text 25"/>
+          <p:cNvPr id="28" name="Text 22"/>
           <p:cNvSpPr/>
           <p:nvPr/>
         </p:nvSpPr>
@@ -27095,7 +27026,7 @@
       </p:sp>
       <p:sp>
         <p:nvSpPr>
-          <p:cNvPr id="32" name="Shape 26"/>
+          <p:cNvPr id="29" name="Shape 23"/>
           <p:cNvSpPr/>
           <p:nvPr/>
         </p:nvSpPr>
@@ -27115,7 +27046,7 @@
       </p:sp>
       <p:pic>
         <p:nvPicPr>
-          <p:cNvPr id="33" name="Image 4" descr="/tmp/claude-0/-home-user-doc-template-engine/198c21fb-8b4a-5b3c-a787-7fafcb963965/scratchpad/workshop/icons/search-white.png">    </p:cNvPr>
+          <p:cNvPr id="30" name="Image 4" descr="/tmp/claude-0/-home-user-doc-template-engine/198c21fb-8b4a-5b3c-a787-7fafcb963965/scratchpad/workshop/icons/search-white.png">    </p:cNvPr>
           <p:cNvPicPr>
             <a:picLocks noChangeAspect="1"/>
           </p:cNvPicPr>
@@ -27139,7 +27070,7 @@
       </p:pic>
       <p:sp>
         <p:nvSpPr>
-          <p:cNvPr id="34" name="Text 27"/>
+          <p:cNvPr id="31" name="Text 24"/>
           <p:cNvSpPr/>
           <p:nvPr/>
         </p:nvSpPr>
@@ -27198,7 +27129,7 @@
       </p:sp>
       <p:sp>
         <p:nvSpPr>
-          <p:cNvPr id="35" name="Shape 28"/>
+          <p:cNvPr id="32" name="Shape 25"/>
           <p:cNvSpPr/>
           <p:nvPr/>
         </p:nvSpPr>
@@ -27218,7 +27149,7 @@
       </p:sp>
       <p:pic>
         <p:nvPicPr>
-          <p:cNvPr id="36" name="Image 5" descr="/tmp/claude-0/-home-user-doc-template-engine/198c21fb-8b4a-5b3c-a787-7fafcb963965/scratchpad/workshop/icons/shield-white.png">    </p:cNvPr>
+          <p:cNvPr id="33" name="Image 5" descr="/tmp/claude-0/-home-user-doc-template-engine/198c21fb-8b4a-5b3c-a787-7fafcb963965/scratchpad/workshop/icons/shield-white.png">    </p:cNvPr>
           <p:cNvPicPr>
             <a:picLocks noChangeAspect="1"/>
           </p:cNvPicPr>
@@ -27242,7 +27173,7 @@
       </p:pic>
       <p:sp>
         <p:nvSpPr>
-          <p:cNvPr id="37" name="Text 29"/>
+          <p:cNvPr id="34" name="Text 26"/>
           <p:cNvSpPr/>
           <p:nvPr/>
         </p:nvSpPr>
@@ -27301,7 +27232,7 @@
       </p:sp>
       <p:sp>
         <p:nvSpPr>
-          <p:cNvPr id="38" name="Shape 30"/>
+          <p:cNvPr id="35" name="Shape 27"/>
           <p:cNvSpPr/>
           <p:nvPr/>
         </p:nvSpPr>
@@ -27321,7 +27252,7 @@
       </p:sp>
       <p:pic>
         <p:nvPicPr>
-          <p:cNvPr id="39" name="Image 6" descr="/tmp/claude-0/-home-user-doc-template-engine/198c21fb-8b4a-5b3c-a787-7fafcb963965/scratchpad/workshop/icons/users-white.png">    </p:cNvPr>
+          <p:cNvPr id="36" name="Image 6" descr="/tmp/claude-0/-home-user-doc-template-engine/198c21fb-8b4a-5b3c-a787-7fafcb963965/scratchpad/workshop/icons/users-white.png">    </p:cNvPr>
           <p:cNvPicPr>
             <a:picLocks noChangeAspect="1"/>
           </p:cNvPicPr>
@@ -27345,7 +27276,7 @@
       </p:pic>
       <p:sp>
         <p:nvSpPr>
-          <p:cNvPr id="40" name="Text 31"/>
+          <p:cNvPr id="37" name="Text 28"/>
           <p:cNvSpPr/>
           <p:nvPr/>
         </p:nvSpPr>

--- a/workshops/workshop-historias-usuario-documentacao.pptx
+++ b/workshops/workshop-historias-usuario-documentacao.pptx
@@ -2742,7 +2742,7 @@
           <a:p>
             <a:r>
               <a:rPr lang="en-US" dirty="0"/>
-              <a:t>5 min. Pergunte quantos desses cinco cheiros a plateia reconhece no Jira da casa — normalmente todos. Importante manter o tom construtivo: cheiro não é culpa de quem escreveu; é ausência de acordo sobre onde cada coisa mora. O acordo vem no fim do workshop.</a:t>
+              <a:t>5 min. Abra explicando o termo — 15 segundos que valem a pena: “cheiro” vem de code smell, expressão cunhada por Kent Beck e difundida por Martin Fowler em Refactoring (1999). Um cheiro é um indício barato de detectar que sugere um problema mais profundo: ele não é o erro em si, é o convite a investigar (a piada original do livro: “se fede, troque”). É o mesmo Kent Beck do XP do Bloco 1 — e é o vocabulário que os times de desenvolvimento já usam (code smell), então gestor e dev saem falando a mesma língua. Depois, pergunte quantos desses cinco cheiros a plateia reconhece no Jira da casa — normalmente todos. Importante manter o tom construtivo: cheiro não é culpa de quem escreveu; é ausência de acordo sobre onde cada coisa mora. O acordo vem no fim do workshop.</a:t>
             </a:r>
             <a:endParaRPr lang="en-US" dirty="0"/>
           </a:p>
@@ -30692,13 +30692,52 @@
       </p:sp>
       <p:sp>
         <p:nvSpPr>
-          <p:cNvPr id="6" name="Shape 4"/>
-          <p:cNvSpPr/>
-          <p:nvPr/>
-        </p:nvSpPr>
-        <p:spPr>
-          <a:xfrm>
-            <a:off x="594360" y="1417320"/>
+          <p:cNvPr id="6" name="Text 4"/>
+          <p:cNvSpPr/>
+          <p:nvPr/>
+        </p:nvSpPr>
+        <p:spPr>
+          <a:xfrm>
+            <a:off x="594360" y="1207008"/>
+            <a:ext cx="11000232" cy="237744"/>
+          </a:xfrm>
+          <a:prstGeom prst="rect">
+            <a:avLst/>
+          </a:prstGeom>
+          <a:noFill/>
+          <a:ln/>
+        </p:spPr>
+        <p:txBody>
+          <a:bodyPr wrap="square" lIns="0" tIns="0" rIns="0" bIns="0" rtlCol="0" anchor="ctr"/>
+          <a:lstStyle/>
+          <a:p>
+            <a:pPr indent="0" marL="0">
+              <a:buNone/>
+            </a:pPr>
+            <a:r>
+              <a:rPr lang="en-US" sz="1000" i="1" dirty="0">
+                <a:solidFill>
+                  <a:srgbClr val="5B6B84"/>
+                </a:solidFill>
+                <a:latin typeface="Calibri" pitchFamily="34" charset="0"/>
+                <a:ea typeface="Calibri" pitchFamily="34" charset="-122"/>
+                <a:cs typeface="Calibri" pitchFamily="34" charset="-120"/>
+              </a:rPr>
+              <a:t>“Cheiro” (do inglês smell): um indício na superfície que costuma apontar um problema mais profundo — Kent Beck &amp; Martin Fowler, Refactoring, 1999.</a:t>
+            </a:r>
+            <a:endParaRPr lang="en-US" sz="1000" dirty="0"/>
+          </a:p>
+        </p:txBody>
+      </p:sp>
+      <p:sp>
+        <p:nvSpPr>
+          <p:cNvPr id="7" name="Shape 5"/>
+          <p:cNvSpPr/>
+          <p:nvPr/>
+        </p:nvSpPr>
+        <p:spPr>
+          <a:xfrm>
+            <a:off x="594360" y="1536192"/>
             <a:ext cx="4892040" cy="786384"/>
           </a:xfrm>
           <a:prstGeom prst="roundRect">
@@ -30719,13 +30758,13 @@
       </p:sp>
       <p:sp>
         <p:nvSpPr>
-          <p:cNvPr id="7" name="Shape 5"/>
-          <p:cNvSpPr/>
-          <p:nvPr/>
-        </p:nvSpPr>
-        <p:spPr>
-          <a:xfrm>
-            <a:off x="758952" y="1618488"/>
+          <p:cNvPr id="8" name="Shape 6"/>
+          <p:cNvSpPr/>
+          <p:nvPr/>
+        </p:nvSpPr>
+        <p:spPr>
+          <a:xfrm>
+            <a:off x="758952" y="1737360"/>
             <a:ext cx="365760" cy="365760"/>
           </a:xfrm>
           <a:prstGeom prst="ellipse">
@@ -30739,7 +30778,7 @@
       </p:sp>
       <p:pic>
         <p:nvPicPr>
-          <p:cNvPr id="8" name="Image 0" descr="/tmp/claude-0/-home-user-doc-template-engine/198c21fb-8b4a-5b3c-a787-7fafcb963965/scratchpad/workshop/icons/search-white.png">    </p:cNvPr>
+          <p:cNvPr id="9" name="Image 0" descr="/tmp/claude-0/-home-user-doc-template-engine/198c21fb-8b4a-5b3c-a787-7fafcb963965/scratchpad/workshop/icons/search-white.png">    </p:cNvPr>
           <p:cNvPicPr>
             <a:picLocks noChangeAspect="1"/>
           </p:cNvPicPr>
@@ -30753,7 +30792,7 @@
         </p:blipFill>
         <p:spPr>
           <a:xfrm>
-            <a:off x="857707" y="1717243"/>
+            <a:off x="857707" y="1836115"/>
             <a:ext cx="168250" cy="168250"/>
           </a:xfrm>
           <a:prstGeom prst="rect">
@@ -30763,13 +30802,13 @@
       </p:pic>
       <p:sp>
         <p:nvSpPr>
-          <p:cNvPr id="9" name="Text 6"/>
-          <p:cNvSpPr/>
-          <p:nvPr/>
-        </p:nvSpPr>
-        <p:spPr>
-          <a:xfrm>
-            <a:off x="1261872" y="1417320"/>
+          <p:cNvPr id="10" name="Text 7"/>
+          <p:cNvSpPr/>
+          <p:nvPr/>
+        </p:nvSpPr>
+        <p:spPr>
+          <a:xfrm>
+            <a:off x="1261872" y="1536192"/>
             <a:ext cx="4114800" cy="786384"/>
           </a:xfrm>
           <a:prstGeom prst="rect">
@@ -30802,13 +30841,13 @@
       </p:sp>
       <p:sp>
         <p:nvSpPr>
-          <p:cNvPr id="10" name="Shape 7"/>
-          <p:cNvSpPr/>
-          <p:nvPr/>
-        </p:nvSpPr>
-        <p:spPr>
-          <a:xfrm>
-            <a:off x="5614416" y="1810512"/>
+          <p:cNvPr id="11" name="Shape 8"/>
+          <p:cNvSpPr/>
+          <p:nvPr/>
+        </p:nvSpPr>
+        <p:spPr>
+          <a:xfrm>
+            <a:off x="5614416" y="1929384"/>
             <a:ext cx="384048" cy="0"/>
           </a:xfrm>
           <a:prstGeom prst="line">
@@ -30826,13 +30865,13 @@
       </p:sp>
       <p:sp>
         <p:nvSpPr>
-          <p:cNvPr id="11" name="Shape 8"/>
-          <p:cNvSpPr/>
-          <p:nvPr/>
-        </p:nvSpPr>
-        <p:spPr>
-          <a:xfrm>
-            <a:off x="6126480" y="1417320"/>
+          <p:cNvPr id="12" name="Shape 9"/>
+          <p:cNvSpPr/>
+          <p:nvPr/>
+        </p:nvSpPr>
+        <p:spPr>
+          <a:xfrm>
+            <a:off x="6126480" y="1536192"/>
             <a:ext cx="5486400" cy="786384"/>
           </a:xfrm>
           <a:prstGeom prst="roundRect">
@@ -30853,13 +30892,13 @@
       </p:sp>
       <p:sp>
         <p:nvSpPr>
-          <p:cNvPr id="12" name="Shape 9"/>
-          <p:cNvSpPr/>
-          <p:nvPr/>
-        </p:nvSpPr>
-        <p:spPr>
-          <a:xfrm>
-            <a:off x="6291072" y="1618488"/>
+          <p:cNvPr id="13" name="Shape 10"/>
+          <p:cNvSpPr/>
+          <p:nvPr/>
+        </p:nvSpPr>
+        <p:spPr>
+          <a:xfrm>
+            <a:off x="6291072" y="1737360"/>
             <a:ext cx="365760" cy="365760"/>
           </a:xfrm>
           <a:prstGeom prst="ellipse">
@@ -30873,7 +30912,7 @@
       </p:sp>
       <p:pic>
         <p:nvPicPr>
-          <p:cNvPr id="13" name="Image 1" descr="/tmp/claude-0/-home-user-doc-template-engine/198c21fb-8b4a-5b3c-a787-7fafcb963965/scratchpad/workshop/icons/checkmini-white.png">    </p:cNvPr>
+          <p:cNvPr id="14" name="Image 1" descr="/tmp/claude-0/-home-user-doc-template-engine/198c21fb-8b4a-5b3c-a787-7fafcb963965/scratchpad/workshop/icons/checkmini-white.png">    </p:cNvPr>
           <p:cNvPicPr>
             <a:picLocks noChangeAspect="1"/>
           </p:cNvPicPr>
@@ -30887,7 +30926,7 @@
         </p:blipFill>
         <p:spPr>
           <a:xfrm>
-            <a:off x="6389827" y="1717243"/>
+            <a:off x="6389827" y="1836115"/>
             <a:ext cx="168250" cy="168250"/>
           </a:xfrm>
           <a:prstGeom prst="rect">
@@ -30897,13 +30936,13 @@
       </p:pic>
       <p:sp>
         <p:nvSpPr>
-          <p:cNvPr id="14" name="Text 10"/>
-          <p:cNvSpPr/>
-          <p:nvPr/>
-        </p:nvSpPr>
-        <p:spPr>
-          <a:xfrm>
-            <a:off x="6793992" y="1417320"/>
+          <p:cNvPr id="15" name="Text 11"/>
+          <p:cNvSpPr/>
+          <p:nvPr/>
+        </p:nvSpPr>
+        <p:spPr>
+          <a:xfrm>
+            <a:off x="6793992" y="1536192"/>
             <a:ext cx="4663440" cy="786384"/>
           </a:xfrm>
           <a:prstGeom prst="rect">
@@ -30936,13 +30975,13 @@
       </p:sp>
       <p:sp>
         <p:nvSpPr>
-          <p:cNvPr id="15" name="Shape 11"/>
-          <p:cNvSpPr/>
-          <p:nvPr/>
-        </p:nvSpPr>
-        <p:spPr>
-          <a:xfrm>
-            <a:off x="594360" y="2350008"/>
+          <p:cNvPr id="16" name="Shape 12"/>
+          <p:cNvSpPr/>
+          <p:nvPr/>
+        </p:nvSpPr>
+        <p:spPr>
+          <a:xfrm>
+            <a:off x="594360" y="2450592"/>
             <a:ext cx="4892040" cy="786384"/>
           </a:xfrm>
           <a:prstGeom prst="roundRect">
@@ -30963,13 +31002,13 @@
       </p:sp>
       <p:sp>
         <p:nvSpPr>
-          <p:cNvPr id="16" name="Shape 12"/>
-          <p:cNvSpPr/>
-          <p:nvPr/>
-        </p:nvSpPr>
-        <p:spPr>
-          <a:xfrm>
-            <a:off x="758952" y="2551176"/>
+          <p:cNvPr id="17" name="Shape 13"/>
+          <p:cNvSpPr/>
+          <p:nvPr/>
+        </p:nvSpPr>
+        <p:spPr>
+          <a:xfrm>
+            <a:off x="758952" y="2651760"/>
             <a:ext cx="365760" cy="365760"/>
           </a:xfrm>
           <a:prstGeom prst="ellipse">
@@ -30983,7 +31022,7 @@
       </p:sp>
       <p:pic>
         <p:nvPicPr>
-          <p:cNvPr id="17" name="Image 2" descr="/tmp/claude-0/-home-user-doc-template-engine/198c21fb-8b4a-5b3c-a787-7fafcb963965/scratchpad/workshop/icons/search-white.png">    </p:cNvPr>
+          <p:cNvPr id="18" name="Image 2" descr="/tmp/claude-0/-home-user-doc-template-engine/198c21fb-8b4a-5b3c-a787-7fafcb963965/scratchpad/workshop/icons/search-white.png">    </p:cNvPr>
           <p:cNvPicPr>
             <a:picLocks noChangeAspect="1"/>
           </p:cNvPicPr>
@@ -30997,7 +31036,7 @@
         </p:blipFill>
         <p:spPr>
           <a:xfrm>
-            <a:off x="857707" y="2649931"/>
+            <a:off x="857707" y="2750515"/>
             <a:ext cx="168250" cy="168250"/>
           </a:xfrm>
           <a:prstGeom prst="rect">
@@ -31007,13 +31046,13 @@
       </p:pic>
       <p:sp>
         <p:nvSpPr>
-          <p:cNvPr id="18" name="Text 13"/>
-          <p:cNvSpPr/>
-          <p:nvPr/>
-        </p:nvSpPr>
-        <p:spPr>
-          <a:xfrm>
-            <a:off x="1261872" y="2350008"/>
+          <p:cNvPr id="19" name="Text 14"/>
+          <p:cNvSpPr/>
+          <p:nvPr/>
+        </p:nvSpPr>
+        <p:spPr>
+          <a:xfrm>
+            <a:off x="1261872" y="2450592"/>
             <a:ext cx="4114800" cy="786384"/>
           </a:xfrm>
           <a:prstGeom prst="rect">
@@ -31046,13 +31085,13 @@
       </p:sp>
       <p:sp>
         <p:nvSpPr>
-          <p:cNvPr id="19" name="Shape 14"/>
-          <p:cNvSpPr/>
-          <p:nvPr/>
-        </p:nvSpPr>
-        <p:spPr>
-          <a:xfrm>
-            <a:off x="5614416" y="2743200"/>
+          <p:cNvPr id="20" name="Shape 15"/>
+          <p:cNvSpPr/>
+          <p:nvPr/>
+        </p:nvSpPr>
+        <p:spPr>
+          <a:xfrm>
+            <a:off x="5614416" y="2843784"/>
             <a:ext cx="384048" cy="0"/>
           </a:xfrm>
           <a:prstGeom prst="line">
@@ -31070,13 +31109,13 @@
       </p:sp>
       <p:sp>
         <p:nvSpPr>
-          <p:cNvPr id="20" name="Shape 15"/>
-          <p:cNvSpPr/>
-          <p:nvPr/>
-        </p:nvSpPr>
-        <p:spPr>
-          <a:xfrm>
-            <a:off x="6126480" y="2350008"/>
+          <p:cNvPr id="21" name="Shape 16"/>
+          <p:cNvSpPr/>
+          <p:nvPr/>
+        </p:nvSpPr>
+        <p:spPr>
+          <a:xfrm>
+            <a:off x="6126480" y="2450592"/>
             <a:ext cx="5486400" cy="786384"/>
           </a:xfrm>
           <a:prstGeom prst="roundRect">
@@ -31097,13 +31136,13 @@
       </p:sp>
       <p:sp>
         <p:nvSpPr>
-          <p:cNvPr id="21" name="Shape 16"/>
-          <p:cNvSpPr/>
-          <p:nvPr/>
-        </p:nvSpPr>
-        <p:spPr>
-          <a:xfrm>
-            <a:off x="6291072" y="2551176"/>
+          <p:cNvPr id="22" name="Shape 17"/>
+          <p:cNvSpPr/>
+          <p:nvPr/>
+        </p:nvSpPr>
+        <p:spPr>
+          <a:xfrm>
+            <a:off x="6291072" y="2651760"/>
             <a:ext cx="365760" cy="365760"/>
           </a:xfrm>
           <a:prstGeom prst="ellipse">
@@ -31117,7 +31156,7 @@
       </p:sp>
       <p:pic>
         <p:nvPicPr>
-          <p:cNvPr id="22" name="Image 3" descr="/tmp/claude-0/-home-user-doc-template-engine/198c21fb-8b4a-5b3c-a787-7fafcb963965/scratchpad/workshop/icons/checkmini-white.png">    </p:cNvPr>
+          <p:cNvPr id="23" name="Image 3" descr="/tmp/claude-0/-home-user-doc-template-engine/198c21fb-8b4a-5b3c-a787-7fafcb963965/scratchpad/workshop/icons/checkmini-white.png">    </p:cNvPr>
           <p:cNvPicPr>
             <a:picLocks noChangeAspect="1"/>
           </p:cNvPicPr>
@@ -31131,7 +31170,7 @@
         </p:blipFill>
         <p:spPr>
           <a:xfrm>
-            <a:off x="6389827" y="2649931"/>
+            <a:off x="6389827" y="2750515"/>
             <a:ext cx="168250" cy="168250"/>
           </a:xfrm>
           <a:prstGeom prst="rect">
@@ -31141,13 +31180,13 @@
       </p:pic>
       <p:sp>
         <p:nvSpPr>
-          <p:cNvPr id="23" name="Text 17"/>
-          <p:cNvSpPr/>
-          <p:nvPr/>
-        </p:nvSpPr>
-        <p:spPr>
-          <a:xfrm>
-            <a:off x="6793992" y="2350008"/>
+          <p:cNvPr id="24" name="Text 18"/>
+          <p:cNvSpPr/>
+          <p:nvPr/>
+        </p:nvSpPr>
+        <p:spPr>
+          <a:xfrm>
+            <a:off x="6793992" y="2450592"/>
             <a:ext cx="4663440" cy="786384"/>
           </a:xfrm>
           <a:prstGeom prst="rect">
@@ -31180,13 +31219,13 @@
       </p:sp>
       <p:sp>
         <p:nvSpPr>
-          <p:cNvPr id="24" name="Shape 18"/>
-          <p:cNvSpPr/>
-          <p:nvPr/>
-        </p:nvSpPr>
-        <p:spPr>
-          <a:xfrm>
-            <a:off x="594360" y="3282696"/>
+          <p:cNvPr id="25" name="Shape 19"/>
+          <p:cNvSpPr/>
+          <p:nvPr/>
+        </p:nvSpPr>
+        <p:spPr>
+          <a:xfrm>
+            <a:off x="594360" y="3364992"/>
             <a:ext cx="4892040" cy="786384"/>
           </a:xfrm>
           <a:prstGeom prst="roundRect">
@@ -31207,13 +31246,13 @@
       </p:sp>
       <p:sp>
         <p:nvSpPr>
-          <p:cNvPr id="25" name="Shape 19"/>
-          <p:cNvSpPr/>
-          <p:nvPr/>
-        </p:nvSpPr>
-        <p:spPr>
-          <a:xfrm>
-            <a:off x="758952" y="3483864"/>
+          <p:cNvPr id="26" name="Shape 20"/>
+          <p:cNvSpPr/>
+          <p:nvPr/>
+        </p:nvSpPr>
+        <p:spPr>
+          <a:xfrm>
+            <a:off x="758952" y="3566160"/>
             <a:ext cx="365760" cy="365760"/>
           </a:xfrm>
           <a:prstGeom prst="ellipse">
@@ -31227,7 +31266,7 @@
       </p:sp>
       <p:pic>
         <p:nvPicPr>
-          <p:cNvPr id="26" name="Image 4" descr="/tmp/claude-0/-home-user-doc-template-engine/198c21fb-8b4a-5b3c-a787-7fafcb963965/scratchpad/workshop/icons/search-white.png">    </p:cNvPr>
+          <p:cNvPr id="27" name="Image 4" descr="/tmp/claude-0/-home-user-doc-template-engine/198c21fb-8b4a-5b3c-a787-7fafcb963965/scratchpad/workshop/icons/search-white.png">    </p:cNvPr>
           <p:cNvPicPr>
             <a:picLocks noChangeAspect="1"/>
           </p:cNvPicPr>
@@ -31241,7 +31280,7 @@
         </p:blipFill>
         <p:spPr>
           <a:xfrm>
-            <a:off x="857707" y="3582619"/>
+            <a:off x="857707" y="3664915"/>
             <a:ext cx="168250" cy="168250"/>
           </a:xfrm>
           <a:prstGeom prst="rect">
@@ -31251,13 +31290,13 @@
       </p:pic>
       <p:sp>
         <p:nvSpPr>
-          <p:cNvPr id="27" name="Text 20"/>
-          <p:cNvSpPr/>
-          <p:nvPr/>
-        </p:nvSpPr>
-        <p:spPr>
-          <a:xfrm>
-            <a:off x="1261872" y="3282696"/>
+          <p:cNvPr id="28" name="Text 21"/>
+          <p:cNvSpPr/>
+          <p:nvPr/>
+        </p:nvSpPr>
+        <p:spPr>
+          <a:xfrm>
+            <a:off x="1261872" y="3364992"/>
             <a:ext cx="4114800" cy="786384"/>
           </a:xfrm>
           <a:prstGeom prst="rect">
@@ -31290,13 +31329,13 @@
       </p:sp>
       <p:sp>
         <p:nvSpPr>
-          <p:cNvPr id="28" name="Shape 21"/>
-          <p:cNvSpPr/>
-          <p:nvPr/>
-        </p:nvSpPr>
-        <p:spPr>
-          <a:xfrm>
-            <a:off x="5614416" y="3675888"/>
+          <p:cNvPr id="29" name="Shape 22"/>
+          <p:cNvSpPr/>
+          <p:nvPr/>
+        </p:nvSpPr>
+        <p:spPr>
+          <a:xfrm>
+            <a:off x="5614416" y="3758184"/>
             <a:ext cx="384048" cy="0"/>
           </a:xfrm>
           <a:prstGeom prst="line">
@@ -31314,13 +31353,13 @@
       </p:sp>
       <p:sp>
         <p:nvSpPr>
-          <p:cNvPr id="29" name="Shape 22"/>
-          <p:cNvSpPr/>
-          <p:nvPr/>
-        </p:nvSpPr>
-        <p:spPr>
-          <a:xfrm>
-            <a:off x="6126480" y="3282696"/>
+          <p:cNvPr id="30" name="Shape 23"/>
+          <p:cNvSpPr/>
+          <p:nvPr/>
+        </p:nvSpPr>
+        <p:spPr>
+          <a:xfrm>
+            <a:off x="6126480" y="3364992"/>
             <a:ext cx="5486400" cy="786384"/>
           </a:xfrm>
           <a:prstGeom prst="roundRect">
@@ -31341,13 +31380,13 @@
       </p:sp>
       <p:sp>
         <p:nvSpPr>
-          <p:cNvPr id="30" name="Shape 23"/>
-          <p:cNvSpPr/>
-          <p:nvPr/>
-        </p:nvSpPr>
-        <p:spPr>
-          <a:xfrm>
-            <a:off x="6291072" y="3483864"/>
+          <p:cNvPr id="31" name="Shape 24"/>
+          <p:cNvSpPr/>
+          <p:nvPr/>
+        </p:nvSpPr>
+        <p:spPr>
+          <a:xfrm>
+            <a:off x="6291072" y="3566160"/>
             <a:ext cx="365760" cy="365760"/>
           </a:xfrm>
           <a:prstGeom prst="ellipse">
@@ -31361,7 +31400,7 @@
       </p:sp>
       <p:pic>
         <p:nvPicPr>
-          <p:cNvPr id="31" name="Image 5" descr="/tmp/claude-0/-home-user-doc-template-engine/198c21fb-8b4a-5b3c-a787-7fafcb963965/scratchpad/workshop/icons/checkmini-white.png">    </p:cNvPr>
+          <p:cNvPr id="32" name="Image 5" descr="/tmp/claude-0/-home-user-doc-template-engine/198c21fb-8b4a-5b3c-a787-7fafcb963965/scratchpad/workshop/icons/checkmini-white.png">    </p:cNvPr>
           <p:cNvPicPr>
             <a:picLocks noChangeAspect="1"/>
           </p:cNvPicPr>
@@ -31375,7 +31414,7 @@
         </p:blipFill>
         <p:spPr>
           <a:xfrm>
-            <a:off x="6389827" y="3582619"/>
+            <a:off x="6389827" y="3664915"/>
             <a:ext cx="168250" cy="168250"/>
           </a:xfrm>
           <a:prstGeom prst="rect">
@@ -31385,13 +31424,13 @@
       </p:pic>
       <p:sp>
         <p:nvSpPr>
-          <p:cNvPr id="32" name="Text 24"/>
-          <p:cNvSpPr/>
-          <p:nvPr/>
-        </p:nvSpPr>
-        <p:spPr>
-          <a:xfrm>
-            <a:off x="6793992" y="3282696"/>
+          <p:cNvPr id="33" name="Text 25"/>
+          <p:cNvSpPr/>
+          <p:nvPr/>
+        </p:nvSpPr>
+        <p:spPr>
+          <a:xfrm>
+            <a:off x="6793992" y="3364992"/>
             <a:ext cx="4663440" cy="786384"/>
           </a:xfrm>
           <a:prstGeom prst="rect">
@@ -31424,13 +31463,13 @@
       </p:sp>
       <p:sp>
         <p:nvSpPr>
-          <p:cNvPr id="33" name="Shape 25"/>
-          <p:cNvSpPr/>
-          <p:nvPr/>
-        </p:nvSpPr>
-        <p:spPr>
-          <a:xfrm>
-            <a:off x="594360" y="4215384"/>
+          <p:cNvPr id="34" name="Shape 26"/>
+          <p:cNvSpPr/>
+          <p:nvPr/>
+        </p:nvSpPr>
+        <p:spPr>
+          <a:xfrm>
+            <a:off x="594360" y="4279392"/>
             <a:ext cx="4892040" cy="786384"/>
           </a:xfrm>
           <a:prstGeom prst="roundRect">
@@ -31451,13 +31490,13 @@
       </p:sp>
       <p:sp>
         <p:nvSpPr>
-          <p:cNvPr id="34" name="Shape 26"/>
-          <p:cNvSpPr/>
-          <p:nvPr/>
-        </p:nvSpPr>
-        <p:spPr>
-          <a:xfrm>
-            <a:off x="758952" y="4416552"/>
+          <p:cNvPr id="35" name="Shape 27"/>
+          <p:cNvSpPr/>
+          <p:nvPr/>
+        </p:nvSpPr>
+        <p:spPr>
+          <a:xfrm>
+            <a:off x="758952" y="4480560"/>
             <a:ext cx="365760" cy="365760"/>
           </a:xfrm>
           <a:prstGeom prst="ellipse">
@@ -31471,7 +31510,7 @@
       </p:sp>
       <p:pic>
         <p:nvPicPr>
-          <p:cNvPr id="35" name="Image 6" descr="/tmp/claude-0/-home-user-doc-template-engine/198c21fb-8b4a-5b3c-a787-7fafcb963965/scratchpad/workshop/icons/search-white.png">    </p:cNvPr>
+          <p:cNvPr id="36" name="Image 6" descr="/tmp/claude-0/-home-user-doc-template-engine/198c21fb-8b4a-5b3c-a787-7fafcb963965/scratchpad/workshop/icons/search-white.png">    </p:cNvPr>
           <p:cNvPicPr>
             <a:picLocks noChangeAspect="1"/>
           </p:cNvPicPr>
@@ -31485,7 +31524,7 @@
         </p:blipFill>
         <p:spPr>
           <a:xfrm>
-            <a:off x="857707" y="4515307"/>
+            <a:off x="857707" y="4579315"/>
             <a:ext cx="168250" cy="168250"/>
           </a:xfrm>
           <a:prstGeom prst="rect">
@@ -31495,13 +31534,13 @@
       </p:pic>
       <p:sp>
         <p:nvSpPr>
-          <p:cNvPr id="36" name="Text 27"/>
-          <p:cNvSpPr/>
-          <p:nvPr/>
-        </p:nvSpPr>
-        <p:spPr>
-          <a:xfrm>
-            <a:off x="1261872" y="4215384"/>
+          <p:cNvPr id="37" name="Text 28"/>
+          <p:cNvSpPr/>
+          <p:nvPr/>
+        </p:nvSpPr>
+        <p:spPr>
+          <a:xfrm>
+            <a:off x="1261872" y="4279392"/>
             <a:ext cx="4114800" cy="786384"/>
           </a:xfrm>
           <a:prstGeom prst="rect">
@@ -31534,13 +31573,13 @@
       </p:sp>
       <p:sp>
         <p:nvSpPr>
-          <p:cNvPr id="37" name="Shape 28"/>
-          <p:cNvSpPr/>
-          <p:nvPr/>
-        </p:nvSpPr>
-        <p:spPr>
-          <a:xfrm>
-            <a:off x="5614416" y="4608576"/>
+          <p:cNvPr id="38" name="Shape 29"/>
+          <p:cNvSpPr/>
+          <p:nvPr/>
+        </p:nvSpPr>
+        <p:spPr>
+          <a:xfrm>
+            <a:off x="5614416" y="4672584"/>
             <a:ext cx="384048" cy="0"/>
           </a:xfrm>
           <a:prstGeom prst="line">
@@ -31558,13 +31597,13 @@
       </p:sp>
       <p:sp>
         <p:nvSpPr>
-          <p:cNvPr id="38" name="Shape 29"/>
-          <p:cNvSpPr/>
-          <p:nvPr/>
-        </p:nvSpPr>
-        <p:spPr>
-          <a:xfrm>
-            <a:off x="6126480" y="4215384"/>
+          <p:cNvPr id="39" name="Shape 30"/>
+          <p:cNvSpPr/>
+          <p:nvPr/>
+        </p:nvSpPr>
+        <p:spPr>
+          <a:xfrm>
+            <a:off x="6126480" y="4279392"/>
             <a:ext cx="5486400" cy="786384"/>
           </a:xfrm>
           <a:prstGeom prst="roundRect">
@@ -31585,13 +31624,13 @@
       </p:sp>
       <p:sp>
         <p:nvSpPr>
-          <p:cNvPr id="39" name="Shape 30"/>
-          <p:cNvSpPr/>
-          <p:nvPr/>
-        </p:nvSpPr>
-        <p:spPr>
-          <a:xfrm>
-            <a:off x="6291072" y="4416552"/>
+          <p:cNvPr id="40" name="Shape 31"/>
+          <p:cNvSpPr/>
+          <p:nvPr/>
+        </p:nvSpPr>
+        <p:spPr>
+          <a:xfrm>
+            <a:off x="6291072" y="4480560"/>
             <a:ext cx="365760" cy="365760"/>
           </a:xfrm>
           <a:prstGeom prst="ellipse">
@@ -31605,7 +31644,7 @@
       </p:sp>
       <p:pic>
         <p:nvPicPr>
-          <p:cNvPr id="40" name="Image 7" descr="/tmp/claude-0/-home-user-doc-template-engine/198c21fb-8b4a-5b3c-a787-7fafcb963965/scratchpad/workshop/icons/checkmini-white.png">    </p:cNvPr>
+          <p:cNvPr id="41" name="Image 7" descr="/tmp/claude-0/-home-user-doc-template-engine/198c21fb-8b4a-5b3c-a787-7fafcb963965/scratchpad/workshop/icons/checkmini-white.png">    </p:cNvPr>
           <p:cNvPicPr>
             <a:picLocks noChangeAspect="1"/>
           </p:cNvPicPr>
@@ -31619,7 +31658,7 @@
         </p:blipFill>
         <p:spPr>
           <a:xfrm>
-            <a:off x="6389827" y="4515307"/>
+            <a:off x="6389827" y="4579315"/>
             <a:ext cx="168250" cy="168250"/>
           </a:xfrm>
           <a:prstGeom prst="rect">
@@ -31629,13 +31668,13 @@
       </p:pic>
       <p:sp>
         <p:nvSpPr>
-          <p:cNvPr id="41" name="Text 31"/>
-          <p:cNvSpPr/>
-          <p:nvPr/>
-        </p:nvSpPr>
-        <p:spPr>
-          <a:xfrm>
-            <a:off x="6793992" y="4215384"/>
+          <p:cNvPr id="42" name="Text 32"/>
+          <p:cNvSpPr/>
+          <p:nvPr/>
+        </p:nvSpPr>
+        <p:spPr>
+          <a:xfrm>
+            <a:off x="6793992" y="4279392"/>
             <a:ext cx="4663440" cy="786384"/>
           </a:xfrm>
           <a:prstGeom prst="rect">
@@ -31668,13 +31707,13 @@
       </p:sp>
       <p:sp>
         <p:nvSpPr>
-          <p:cNvPr id="42" name="Shape 32"/>
-          <p:cNvSpPr/>
-          <p:nvPr/>
-        </p:nvSpPr>
-        <p:spPr>
-          <a:xfrm>
-            <a:off x="594360" y="5148072"/>
+          <p:cNvPr id="43" name="Shape 33"/>
+          <p:cNvSpPr/>
+          <p:nvPr/>
+        </p:nvSpPr>
+        <p:spPr>
+          <a:xfrm>
+            <a:off x="594360" y="5193792"/>
             <a:ext cx="4892040" cy="786384"/>
           </a:xfrm>
           <a:prstGeom prst="roundRect">
@@ -31695,13 +31734,13 @@
       </p:sp>
       <p:sp>
         <p:nvSpPr>
-          <p:cNvPr id="43" name="Shape 33"/>
-          <p:cNvSpPr/>
-          <p:nvPr/>
-        </p:nvSpPr>
-        <p:spPr>
-          <a:xfrm>
-            <a:off x="758952" y="5349240"/>
+          <p:cNvPr id="44" name="Shape 34"/>
+          <p:cNvSpPr/>
+          <p:nvPr/>
+        </p:nvSpPr>
+        <p:spPr>
+          <a:xfrm>
+            <a:off x="758952" y="5394960"/>
             <a:ext cx="365760" cy="365760"/>
           </a:xfrm>
           <a:prstGeom prst="ellipse">
@@ -31715,7 +31754,7 @@
       </p:sp>
       <p:pic>
         <p:nvPicPr>
-          <p:cNvPr id="44" name="Image 8" descr="/tmp/claude-0/-home-user-doc-template-engine/198c21fb-8b4a-5b3c-a787-7fafcb963965/scratchpad/workshop/icons/search-white.png">    </p:cNvPr>
+          <p:cNvPr id="45" name="Image 8" descr="/tmp/claude-0/-home-user-doc-template-engine/198c21fb-8b4a-5b3c-a787-7fafcb963965/scratchpad/workshop/icons/search-white.png">    </p:cNvPr>
           <p:cNvPicPr>
             <a:picLocks noChangeAspect="1"/>
           </p:cNvPicPr>
@@ -31729,7 +31768,7 @@
         </p:blipFill>
         <p:spPr>
           <a:xfrm>
-            <a:off x="857707" y="5447995"/>
+            <a:off x="857707" y="5493715"/>
             <a:ext cx="168250" cy="168250"/>
           </a:xfrm>
           <a:prstGeom prst="rect">
@@ -31739,13 +31778,13 @@
       </p:pic>
       <p:sp>
         <p:nvSpPr>
-          <p:cNvPr id="45" name="Text 34"/>
-          <p:cNvSpPr/>
-          <p:nvPr/>
-        </p:nvSpPr>
-        <p:spPr>
-          <a:xfrm>
-            <a:off x="1261872" y="5148072"/>
+          <p:cNvPr id="46" name="Text 35"/>
+          <p:cNvSpPr/>
+          <p:nvPr/>
+        </p:nvSpPr>
+        <p:spPr>
+          <a:xfrm>
+            <a:off x="1261872" y="5193792"/>
             <a:ext cx="4114800" cy="786384"/>
           </a:xfrm>
           <a:prstGeom prst="rect">
@@ -31778,13 +31817,13 @@
       </p:sp>
       <p:sp>
         <p:nvSpPr>
-          <p:cNvPr id="46" name="Shape 35"/>
-          <p:cNvSpPr/>
-          <p:nvPr/>
-        </p:nvSpPr>
-        <p:spPr>
-          <a:xfrm>
-            <a:off x="5614416" y="5541264"/>
+          <p:cNvPr id="47" name="Shape 36"/>
+          <p:cNvSpPr/>
+          <p:nvPr/>
+        </p:nvSpPr>
+        <p:spPr>
+          <a:xfrm>
+            <a:off x="5614416" y="5586984"/>
             <a:ext cx="384048" cy="0"/>
           </a:xfrm>
           <a:prstGeom prst="line">
@@ -31802,13 +31841,13 @@
       </p:sp>
       <p:sp>
         <p:nvSpPr>
-          <p:cNvPr id="47" name="Shape 36"/>
-          <p:cNvSpPr/>
-          <p:nvPr/>
-        </p:nvSpPr>
-        <p:spPr>
-          <a:xfrm>
-            <a:off x="6126480" y="5148072"/>
+          <p:cNvPr id="48" name="Shape 37"/>
+          <p:cNvSpPr/>
+          <p:nvPr/>
+        </p:nvSpPr>
+        <p:spPr>
+          <a:xfrm>
+            <a:off x="6126480" y="5193792"/>
             <a:ext cx="5486400" cy="786384"/>
           </a:xfrm>
           <a:prstGeom prst="roundRect">
@@ -31829,13 +31868,13 @@
       </p:sp>
       <p:sp>
         <p:nvSpPr>
-          <p:cNvPr id="48" name="Shape 37"/>
-          <p:cNvSpPr/>
-          <p:nvPr/>
-        </p:nvSpPr>
-        <p:spPr>
-          <a:xfrm>
-            <a:off x="6291072" y="5349240"/>
+          <p:cNvPr id="49" name="Shape 38"/>
+          <p:cNvSpPr/>
+          <p:nvPr/>
+        </p:nvSpPr>
+        <p:spPr>
+          <a:xfrm>
+            <a:off x="6291072" y="5394960"/>
             <a:ext cx="365760" cy="365760"/>
           </a:xfrm>
           <a:prstGeom prst="ellipse">
@@ -31849,7 +31888,7 @@
       </p:sp>
       <p:pic>
         <p:nvPicPr>
-          <p:cNvPr id="49" name="Image 9" descr="/tmp/claude-0/-home-user-doc-template-engine/198c21fb-8b4a-5b3c-a787-7fafcb963965/scratchpad/workshop/icons/checkmini-white.png">    </p:cNvPr>
+          <p:cNvPr id="50" name="Image 9" descr="/tmp/claude-0/-home-user-doc-template-engine/198c21fb-8b4a-5b3c-a787-7fafcb963965/scratchpad/workshop/icons/checkmini-white.png">    </p:cNvPr>
           <p:cNvPicPr>
             <a:picLocks noChangeAspect="1"/>
           </p:cNvPicPr>
@@ -31863,7 +31902,7 @@
         </p:blipFill>
         <p:spPr>
           <a:xfrm>
-            <a:off x="6389827" y="5447995"/>
+            <a:off x="6389827" y="5493715"/>
             <a:ext cx="168250" cy="168250"/>
           </a:xfrm>
           <a:prstGeom prst="rect">
@@ -31873,13 +31912,13 @@
       </p:pic>
       <p:sp>
         <p:nvSpPr>
-          <p:cNvPr id="50" name="Text 38"/>
-          <p:cNvSpPr/>
-          <p:nvPr/>
-        </p:nvSpPr>
-        <p:spPr>
-          <a:xfrm>
-            <a:off x="6793992" y="5148072"/>
+          <p:cNvPr id="51" name="Text 39"/>
+          <p:cNvSpPr/>
+          <p:nvPr/>
+        </p:nvSpPr>
+        <p:spPr>
+          <a:xfrm>
+            <a:off x="6793992" y="5193792"/>
             <a:ext cx="4663440" cy="786384"/>
           </a:xfrm>
           <a:prstGeom prst="rect">
@@ -31912,30 +31951,30 @@
       </p:sp>
       <p:sp>
         <p:nvSpPr>
-          <p:cNvPr id="51" name="Text 39"/>
-          <p:cNvSpPr/>
-          <p:nvPr/>
-        </p:nvSpPr>
-        <p:spPr>
-          <a:xfrm>
-            <a:off x="594360" y="6172200"/>
-            <a:ext cx="11000232" cy="320040"/>
-          </a:xfrm>
-          <a:prstGeom prst="rect">
-            <a:avLst/>
-          </a:prstGeom>
-          <a:noFill/>
-          <a:ln/>
-        </p:spPr>
-        <p:txBody>
-          <a:bodyPr wrap="square" lIns="0" tIns="0" rIns="0" bIns="0" rtlCol="0" anchor="ctr"/>
-          <a:lstStyle/>
-          <a:p>
-            <a:pPr indent="0" marL="0">
-              <a:buNone/>
-            </a:pPr>
-            <a:r>
-              <a:rPr lang="en-US" sz="1200" i="1" dirty="0">
+          <p:cNvPr id="52" name="Text 40"/>
+          <p:cNvSpPr/>
+          <p:nvPr/>
+        </p:nvSpPr>
+        <p:spPr>
+          <a:xfrm>
+            <a:off x="594360" y="6144768"/>
+            <a:ext cx="11000232" cy="274320"/>
+          </a:xfrm>
+          <a:prstGeom prst="rect">
+            <a:avLst/>
+          </a:prstGeom>
+          <a:noFill/>
+          <a:ln/>
+        </p:spPr>
+        <p:txBody>
+          <a:bodyPr wrap="square" lIns="0" tIns="0" rIns="0" bIns="0" rtlCol="0" anchor="ctr"/>
+          <a:lstStyle/>
+          <a:p>
+            <a:pPr indent="0" marL="0">
+              <a:buNone/>
+            </a:pPr>
+            <a:r>
+              <a:rPr lang="en-US" sz="1150" i="1" dirty="0">
                 <a:solidFill>
                   <a:srgbClr val="C77F1A"/>
                 </a:solidFill>
@@ -31945,7 +31984,7 @@
               </a:rPr>
               <a:t>Cada antídoto vira uma cláusula do acordo de trabalho (DoR/DoD) — slide final do Bloco 5.</a:t>
             </a:r>
-            <a:endParaRPr lang="en-US" sz="1200" dirty="0"/>
+            <a:endParaRPr lang="en-US" sz="1150" dirty="0"/>
           </a:p>
         </p:txBody>
       </p:sp>
